--- a/docs/user-manual/01-initiator.pptx
+++ b/docs/user-manual/01-initiator.pptx
@@ -3490,7 +3490,7 @@
                   <a:srgbClr val="8AB4D8"/>
                 </a:solidFill>
               </a:rPr>
-              <a:t>Version:  </a:t>
+              <a:t>Key actions:  </a:t>
             </a:r>
             <a:r>
               <a:rPr sz="1100">
@@ -3498,7 +3498,7 @@
                   <a:srgbClr val="D0E3F2"/>
                 </a:solidFill>
               </a:rPr>
-              <a:t>1.0</a:t>
+              <a:t>Create PRs, EFTs, Petty Cash, Expense Claims; track status</a:t>
             </a:r>
           </a:p>
         </p:txBody>
@@ -4094,6 +4094,50 @@
                 </a:solidFill>
                 <a:latin typeface="Consolas"/>
               </a:rPr>
+              <a:t>                                  |</a:t>
+            </a:r>
+          </a:p>
+          <a:p>
+            <a:r>
+              <a:rPr sz="1200">
+                <a:solidFill>
+                  <a:srgbClr val="111111"/>
+                </a:solidFill>
+                <a:latin typeface="Consolas"/>
+              </a:rPr>
+              <a:t>                         Procurement sees your PR here (read-only)</a:t>
+            </a:r>
+          </a:p>
+          <a:p>
+            <a:r>
+              <a:rPr sz="1200">
+                <a:solidFill>
+                  <a:srgbClr val="111111"/>
+                </a:solidFill>
+                <a:latin typeface="Consolas"/>
+              </a:rPr>
+              <a:t>                         and may already be contacting suppliers</a:t>
+            </a:r>
+          </a:p>
+          <a:p>
+            <a:r>
+              <a:rPr sz="1200">
+                <a:solidFill>
+                  <a:srgbClr val="111111"/>
+                </a:solidFill>
+                <a:latin typeface="Consolas"/>
+              </a:rPr>
+              <a:t/>
+            </a:r>
+          </a:p>
+          <a:p>
+            <a:r>
+              <a:rPr sz="1200">
+                <a:solidFill>
+                  <a:srgbClr val="111111"/>
+                </a:solidFill>
+                <a:latin typeface="Consolas"/>
+              </a:rPr>
               <a:t>  * Only if value exceeds MD threshold.</a:t>
             </a:r>
           </a:p>
@@ -5554,7 +5598,7 @@
                   <a:srgbClr val="111111"/>
                 </a:solidFill>
               </a:rPr>
-              <a:t>Click any row to open the full detail page and Approval History.</a:t>
+              <a:t>-- At pending_finance: Procurement can already see your PR and may be sourcing quotes.</a:t>
             </a:r>
           </a:p>
         </p:txBody>
@@ -5639,7 +5683,7 @@
                   <a:srgbClr val="111111"/>
                 </a:solidFill>
               </a:rPr>
-              <a:t>If rejected: read the rejection comment in Approval History.</a:t>
+              <a:t>Click any row to open the full detail page and Approval History.</a:t>
             </a:r>
           </a:p>
         </p:txBody>
@@ -5724,7 +5768,7 @@
                   <a:srgbClr val="111111"/>
                 </a:solidFill>
               </a:rPr>
-              <a:t>Create a new corrected submission. In the description, reference the rejected ID.</a:t>
+              <a:t>If rejected: read the rejection comment in Approval History.</a:t>
             </a:r>
           </a:p>
         </p:txBody>
@@ -5789,6 +5833,91 @@
         <p:spPr>
           <a:xfrm>
             <a:off x="1033272" y="4023360"/>
+            <a:ext cx="10634472" cy="566928"/>
+          </a:xfrm>
+          <a:prstGeom prst="rect">
+            <a:avLst/>
+          </a:prstGeom>
+          <a:noFill/>
+        </p:spPr>
+        <p:txBody>
+          <a:bodyPr wrap="square">
+            <a:spAutoFit/>
+          </a:bodyPr>
+          <a:lstStyle/>
+          <a:p>
+            <a:pPr algn="l"/>
+            <a:r>
+              <a:rPr sz="1300" b="0" i="0">
+                <a:solidFill>
+                  <a:srgbClr val="111111"/>
+                </a:solidFill>
+              </a:rPr>
+              <a:t>Create a new corrected submission. In the description, reference the rejected ID.</a:t>
+            </a:r>
+          </a:p>
+        </p:txBody>
+      </p:sp>
+      <p:sp>
+        <p:nvSpPr>
+          <p:cNvPr id="16" name="Oval 15"/>
+          <p:cNvSpPr/>
+          <p:nvPr/>
+        </p:nvSpPr>
+        <p:spPr>
+          <a:xfrm>
+            <a:off x="502920" y="4645152"/>
+            <a:ext cx="411480" cy="411480"/>
+          </a:xfrm>
+          <a:prstGeom prst="ellipse">
+            <a:avLst/>
+          </a:prstGeom>
+          <a:solidFill>
+            <a:srgbClr val="0B4A8A"/>
+          </a:solidFill>
+          <a:ln>
+            <a:noFill/>
+          </a:ln>
+        </p:spPr>
+        <p:style>
+          <a:lnRef idx="1">
+            <a:schemeClr val="accent1"/>
+          </a:lnRef>
+          <a:fillRef idx="3">
+            <a:schemeClr val="accent1"/>
+          </a:fillRef>
+          <a:effectRef idx="2">
+            <a:schemeClr val="accent1"/>
+          </a:effectRef>
+          <a:fontRef idx="minor">
+            <a:schemeClr val="lt1"/>
+          </a:fontRef>
+        </p:style>
+        <p:txBody>
+          <a:bodyPr rtlCol="0" anchor="ctr"/>
+          <a:lstStyle/>
+          <a:p>
+            <a:pPr algn="ctr"/>
+            <a:r>
+              <a:rPr sz="1200" b="1">
+                <a:solidFill>
+                  <a:srgbClr val="FFFFFF"/>
+                </a:solidFill>
+              </a:rPr>
+              <a:t>7</a:t>
+            </a:r>
+          </a:p>
+        </p:txBody>
+      </p:sp>
+      <p:sp>
+        <p:nvSpPr>
+          <p:cNvPr id="17" name="TextBox 16"/>
+          <p:cNvSpPr txBox="1"/>
+          <p:nvPr/>
+        </p:nvSpPr>
+        <p:spPr>
+          <a:xfrm>
+            <a:off x="1033272" y="4590288"/>
             <a:ext cx="10634472" cy="566928"/>
           </a:xfrm>
           <a:prstGeom prst="rect">
